--- a/docs/SignBridge_First_Evaluation.pptx
+++ b/docs/SignBridge_First_Evaluation.pptx
@@ -3283,7 +3283,7 @@
                 </a:solidFill>
                 <a:latin typeface="Aptos"/>
               </a:rPr>
-              <a:t>Student A: &lt;name&gt;     |     Student B: &lt;name&gt;</a:t>
+              <a:t>Student A: Ikram Ferchichi     |     Student B: Malak Ghannouchi</a:t>
             </a:r>
           </a:p>
         </p:txBody>
